--- a/slides-5-the-truth.pptx
+++ b/slides-5-the-truth.pptx
@@ -17,6 +17,7 @@
     <p:sldId id="262" r:id="rId8"/>
     <p:sldId id="263" r:id="rId9"/>
     <p:sldId id="264" r:id="rId10"/>
+    <p:sldId id="268" r:id="rId19"/>
     <p:sldId id="265" r:id="rId11"/>
     <p:sldId id="266" r:id="rId12"/>
     <p:sldId id="267" r:id="rId13"/>
@@ -1854,6 +1855,942 @@
 
 <file path=ppt/slides/slide10.xml><?xml version="1.0" encoding="utf-8"?>
 <p:sld xmlns:a="http://schemas.openxmlformats.org/drawingml/2006/main" xmlns:r="http://schemas.openxmlformats.org/officeDocument/2006/relationships" xmlns:p="http://schemas.openxmlformats.org/presentationml/2006/main">
+  <p:cSld name="Slide 8">
+    <p:bg>
+      <p:bgPr>
+        <a:solidFill>
+          <a:srgbClr val="070B14"/>
+        </a:solidFill>
+        <a:effectLst/>
+      </p:bgPr>
+    </p:bg>
+    <p:spTree>
+      <p:nvGrpSpPr>
+        <p:cNvPr id="1" name=""/>
+        <p:cNvGrpSpPr/>
+        <p:nvPr/>
+      </p:nvGrpSpPr>
+      <p:grpSpPr>
+        <a:xfrm>
+          <a:off x="0" y="0"/>
+          <a:ext cx="0" cy="0"/>
+          <a:chOff x="0" y="0"/>
+          <a:chExt cx="0" cy="0"/>
+        </a:xfrm>
+      </p:grpSpPr>
+      <p:sp>
+        <p:nvSpPr>
+          <p:cNvPr id="2" name="Text 0"/>
+          <p:cNvSpPr/>
+          <p:nvPr/>
+        </p:nvSpPr>
+        <p:spPr>
+          <a:xfrm>
+            <a:off x="457200" y="6473952"/>
+            <a:ext cx="7315200" cy="274320"/>
+          </a:xfrm>
+          <a:prstGeom prst="rect">
+            <a:avLst/>
+          </a:prstGeom>
+          <a:noFill/>
+          <a:ln/>
+        </p:spPr>
+        <p:txBody>
+          <a:bodyPr wrap="square" lIns="0" tIns="0" rIns="0" bIns="0" rtlCol="0" anchor="ctr"/>
+          <a:lstStyle/>
+          <a:p>
+            <a:pPr marL="0" indent="0">
+              <a:buNone/>
+            </a:pPr>
+            <a:r>
+              <a:rPr lang="en-US" sz="900" dirty="0">
+                <a:solidFill>
+                  <a:srgbClr val="7A93AE"/>
+                </a:solidFill>
+                <a:latin typeface="Microsoft JhengHei" pitchFamily="34" charset="0"/>
+                <a:ea typeface="Microsoft JhengHei" pitchFamily="34" charset="-122"/>
+                <a:cs typeface="Microsoft JhengHei" pitchFamily="34" charset="-120"/>
+              </a:rPr>
+              <a:t>MISSION 05 · 火星第一眼：1976 維京一號的拍照任務　9</a:t>
+            </a:r>
+            <a:endParaRPr lang="en-US" sz="900" dirty="0"/>
+          </a:p>
+        </p:txBody>
+      </p:sp>
+      <p:sp>
+        <p:nvSpPr>
+          <p:cNvPr id="4" name="Text 1"/>
+          <p:cNvSpPr/>
+          <p:nvPr/>
+        </p:nvSpPr>
+        <p:spPr>
+          <a:xfrm>
+            <a:off x="457200" y="320040"/>
+            <a:ext cx="11247120" cy="640080"/>
+          </a:xfrm>
+          <a:prstGeom prst="rect">
+            <a:avLst/>
+          </a:prstGeom>
+          <a:noFill/>
+          <a:ln/>
+        </p:spPr>
+        <p:txBody>
+          <a:bodyPr wrap="square" lIns="0" tIns="0" rIns="0" bIns="0" rtlCol="0" anchor="ctr"/>
+          <a:lstStyle/>
+          <a:p>
+            <a:pPr marL="0" indent="0">
+              <a:buNone/>
+            </a:pPr>
+            <a:r>
+              <a:rPr lang="en-US" sz="3000" b="1" dirty="0">
+                <a:solidFill>
+                  <a:srgbClr val="F2E3C8"/>
+                </a:solidFill>
+                <a:latin typeface="Microsoft JhengHei" pitchFamily="34" charset="0"/>
+                <a:ea typeface="Microsoft JhengHei" pitchFamily="34" charset="-122"/>
+                <a:cs typeface="Microsoft JhengHei" pitchFamily="34" charset="-120"/>
+              </a:rPr>
+              <a:t>換你算：傳「我的照片」要幾天？</a:t>
+            </a:r>
+            <a:endParaRPr lang="en-US" sz="3000" dirty="0"/>
+          </a:p>
+        </p:txBody>
+      </p:sp>
+      <p:sp>
+        <p:nvSpPr>
+          <p:cNvPr id="5" name="Shape 2"/>
+          <p:cNvSpPr/>
+          <p:nvPr/>
+        </p:nvSpPr>
+        <p:spPr>
+          <a:xfrm>
+            <a:off x="457200" y="1417320"/>
+            <a:ext cx="2724912" cy="2377440"/>
+          </a:xfrm>
+          <a:prstGeom prst="roundRect">
+            <a:avLst>
+              <a:gd name="adj" fmla="val 3077"/>
+            </a:avLst>
+          </a:prstGeom>
+          <a:solidFill>
+            <a:srgbClr val="0D1424"/>
+          </a:solidFill>
+          <a:ln w="12700">
+            <a:solidFill>
+              <a:srgbClr val="1E3A5C"/>
+            </a:solidFill>
+            <a:prstDash val="solid"/>
+          </a:ln>
+        </p:spPr>
+      </p:sp>
+      <p:sp>
+        <p:nvSpPr>
+          <p:cNvPr id="6" name="Text 3"/>
+          <p:cNvSpPr/>
+          <p:nvPr/>
+        </p:nvSpPr>
+        <p:spPr>
+          <a:xfrm>
+            <a:off x="457200" y="1691640"/>
+            <a:ext cx="2724912" cy="822960"/>
+          </a:xfrm>
+          <a:prstGeom prst="rect">
+            <a:avLst/>
+          </a:prstGeom>
+          <a:noFill/>
+          <a:ln/>
+        </p:spPr>
+        <p:txBody>
+          <a:bodyPr wrap="square" lIns="0" tIns="0" rIns="0" bIns="0" rtlCol="0" anchor="ctr"/>
+          <a:lstStyle/>
+          <a:p>
+            <a:pPr marL="0" indent="0" algn="ctr">
+              <a:buNone/>
+            </a:pPr>
+            <a:r>
+              <a:rPr lang="en-US" sz="3000" b="1" dirty="0">
+                <a:solidFill>
+                  <a:srgbClr val="F2E3C8"/>
+                </a:solidFill>
+                <a:latin typeface="Courier New" pitchFamily="34" charset="0"/>
+                <a:ea typeface="Courier New" pitchFamily="34" charset="-122"/>
+                <a:cs typeface="Courier New" pitchFamily="34" charset="-120"/>
+              </a:rPr>
+              <a:t>1,200 萬</a:t>
+            </a:r>
+            <a:endParaRPr lang="en-US" sz="3000" dirty="0"/>
+          </a:p>
+        </p:txBody>
+      </p:sp>
+      <p:sp>
+        <p:nvSpPr>
+          <p:cNvPr id="7" name="Text 4"/>
+          <p:cNvSpPr/>
+          <p:nvPr/>
+        </p:nvSpPr>
+        <p:spPr>
+          <a:xfrm>
+            <a:off x="594360" y="2651760"/>
+            <a:ext cx="2450592" cy="1005840"/>
+          </a:xfrm>
+          <a:prstGeom prst="rect">
+            <a:avLst/>
+          </a:prstGeom>
+          <a:noFill/>
+          <a:ln/>
+        </p:spPr>
+        <p:txBody>
+          <a:bodyPr wrap="square" lIns="0" tIns="0" rIns="0" bIns="0" rtlCol="0" anchor="ctr"/>
+          <a:lstStyle/>
+          <a:p>
+            <a:pPr marL="0" indent="0" algn="ctr">
+              <a:lnSpc>
+                <a:spcPct val="125000"/>
+              </a:lnSpc>
+              <a:buNone/>
+            </a:pPr>
+            <a:r>
+              <a:rPr lang="en-US" sz="800" dirty="0">
+                <a:solidFill>
+                  <a:srgbClr val="C9D6E8"/>
+                </a:solidFill>
+                <a:latin typeface="Microsoft JhengHei" pitchFamily="34" charset="0"/>
+                <a:ea typeface="Microsoft JhengHei" pitchFamily="34" charset="-122"/>
+                <a:cs typeface="Microsoft JhengHei" pitchFamily="34" charset="-120"/>
+              </a:rPr>
+              <a:t>我的照片像素</a:t>
+            </a:r>
+            <a:endParaRPr lang="en-US" sz="800" dirty="0"/>
+          </a:p>
+          <a:p>
+            <a:pPr marL="0" indent="0" algn="ctr">
+              <a:lnSpc>
+                <a:spcPct val="125000"/>
+              </a:lnSpc>
+              <a:buNone/>
+            </a:pPr>
+            <a:r>
+              <a:rPr lang="en-US" sz="800" dirty="0">
+                <a:solidFill>
+                  <a:srgbClr val="C9D6E8"/>
+                </a:solidFill>
+                <a:latin typeface="Microsoft JhengHei" pitchFamily="34" charset="0"/>
+                <a:ea typeface="Microsoft JhengHei" pitchFamily="34" charset="-122"/>
+                <a:cs typeface="Microsoft JhengHei" pitchFamily="34" charset="-120"/>
+              </a:rPr>
+              <a:t>（例：4000×3000）</a:t>
+            </a:r>
+            <a:endParaRPr lang="en-US" sz="800" dirty="0"/>
+          </a:p>
+        </p:txBody>
+      </p:sp>
+      <p:sp>
+        <p:nvSpPr>
+          <p:cNvPr id="8" name="Text 5"/>
+          <p:cNvSpPr/>
+          <p:nvPr/>
+        </p:nvSpPr>
+        <p:spPr>
+          <a:xfrm>
+            <a:off x="3108960" y="2331720"/>
+            <a:ext cx="365760" cy="457200"/>
+          </a:xfrm>
+          <a:prstGeom prst="rect">
+            <a:avLst/>
+          </a:prstGeom>
+          <a:noFill/>
+          <a:ln/>
+        </p:spPr>
+        <p:txBody>
+          <a:bodyPr wrap="square" lIns="0" tIns="0" rIns="0" bIns="0" rtlCol="0" anchor="ctr"/>
+          <a:lstStyle/>
+          <a:p>
+            <a:pPr marL="0" indent="0" algn="ctr">
+              <a:buNone/>
+            </a:pPr>
+            <a:r>
+              <a:rPr lang="en-US" sz="1800" dirty="0">
+                <a:solidFill>
+                  <a:srgbClr val="7A93AE"/>
+                </a:solidFill>
+              </a:rPr>
+              <a:t>→</a:t>
+            </a:r>
+            <a:endParaRPr lang="en-US" sz="1800" dirty="0"/>
+          </a:p>
+        </p:txBody>
+      </p:sp>
+      <p:sp>
+        <p:nvSpPr>
+          <p:cNvPr id="9" name="Shape 6"/>
+          <p:cNvSpPr/>
+          <p:nvPr/>
+        </p:nvSpPr>
+        <p:spPr>
+          <a:xfrm>
+            <a:off x="3419856" y="1417320"/>
+            <a:ext cx="2724912" cy="2377440"/>
+          </a:xfrm>
+          <a:prstGeom prst="roundRect">
+            <a:avLst>
+              <a:gd name="adj" fmla="val 3077"/>
+            </a:avLst>
+          </a:prstGeom>
+          <a:solidFill>
+            <a:srgbClr val="0D1424"/>
+          </a:solidFill>
+          <a:ln w="12700">
+            <a:solidFill>
+              <a:srgbClr val="1E3A5C"/>
+            </a:solidFill>
+            <a:prstDash val="solid"/>
+          </a:ln>
+        </p:spPr>
+      </p:sp>
+      <p:sp>
+        <p:nvSpPr>
+          <p:cNvPr id="10" name="Text 7"/>
+          <p:cNvSpPr/>
+          <p:nvPr/>
+        </p:nvSpPr>
+        <p:spPr>
+          <a:xfrm>
+            <a:off x="3419856" y="1691640"/>
+            <a:ext cx="2724912" cy="822960"/>
+          </a:xfrm>
+          <a:prstGeom prst="rect">
+            <a:avLst/>
+          </a:prstGeom>
+          <a:noFill/>
+          <a:ln/>
+        </p:spPr>
+        <p:txBody>
+          <a:bodyPr wrap="square" lIns="0" tIns="0" rIns="0" bIns="0" rtlCol="0" anchor="ctr"/>
+          <a:lstStyle/>
+          <a:p>
+            <a:pPr marL="0" indent="0" algn="ctr">
+              <a:buNone/>
+            </a:pPr>
+            <a:r>
+              <a:rPr lang="en-US" sz="3000" b="1" dirty="0">
+                <a:solidFill>
+                  <a:srgbClr val="F2E3C8"/>
+                </a:solidFill>
+                <a:latin typeface="Courier New" pitchFamily="34" charset="0"/>
+                <a:ea typeface="Courier New" pitchFamily="34" charset="-122"/>
+                <a:cs typeface="Courier New" pitchFamily="34" charset="-120"/>
+              </a:rPr>
+              <a:t>7,200 萬</a:t>
+            </a:r>
+            <a:endParaRPr lang="en-US" sz="3000" dirty="0"/>
+          </a:p>
+        </p:txBody>
+      </p:sp>
+      <p:sp>
+        <p:nvSpPr>
+          <p:cNvPr id="11" name="Text 8"/>
+          <p:cNvSpPr/>
+          <p:nvPr/>
+        </p:nvSpPr>
+        <p:spPr>
+          <a:xfrm>
+            <a:off x="3557016" y="2651760"/>
+            <a:ext cx="2450592" cy="1005840"/>
+          </a:xfrm>
+          <a:prstGeom prst="rect">
+            <a:avLst/>
+          </a:prstGeom>
+          <a:noFill/>
+          <a:ln/>
+        </p:spPr>
+        <p:txBody>
+          <a:bodyPr wrap="square" lIns="0" tIns="0" rIns="0" bIns="0" rtlCol="0" anchor="ctr"/>
+          <a:lstStyle/>
+          <a:p>
+            <a:pPr marL="0" indent="0" algn="ctr">
+              <a:lnSpc>
+                <a:spcPct val="125000"/>
+              </a:lnSpc>
+              <a:buNone/>
+            </a:pPr>
+            <a:r>
+              <a:rPr lang="en-US" sz="800" dirty="0">
+                <a:solidFill>
+                  <a:srgbClr val="C9D6E8"/>
+                </a:solidFill>
+                <a:latin typeface="Microsoft JhengHei" pitchFamily="34" charset="0"/>
+                <a:ea typeface="Microsoft JhengHei" pitchFamily="34" charset="-122"/>
+                <a:cs typeface="Microsoft JhengHei" pitchFamily="34" charset="-120"/>
+              </a:rPr>
+              <a:t>要傳的訊號數</a:t>
+            </a:r>
+            <a:endParaRPr lang="en-US" sz="800" dirty="0"/>
+          </a:p>
+          <a:p>
+            <a:pPr marL="0" indent="0" algn="ctr">
+              <a:lnSpc>
+                <a:spcPct val="125000"/>
+              </a:lnSpc>
+              <a:buNone/>
+            </a:pPr>
+            <a:r>
+              <a:rPr lang="en-US" sz="800" dirty="0">
+                <a:solidFill>
+                  <a:srgbClr val="C9D6E8"/>
+                </a:solidFill>
+                <a:latin typeface="Microsoft JhengHei" pitchFamily="34" charset="0"/>
+                <a:ea typeface="Microsoft JhengHei" pitchFamily="34" charset="-122"/>
+                <a:cs typeface="Microsoft JhengHei" pitchFamily="34" charset="-120"/>
+              </a:rPr>
+              <a:t>（每格 6 位元，黑白）</a:t>
+            </a:r>
+            <a:endParaRPr lang="en-US" sz="800" dirty="0"/>
+          </a:p>
+        </p:txBody>
+      </p:sp>
+      <p:sp>
+        <p:nvSpPr>
+          <p:cNvPr id="12" name="Text 9"/>
+          <p:cNvSpPr/>
+          <p:nvPr/>
+        </p:nvSpPr>
+        <p:spPr>
+          <a:xfrm>
+            <a:off x="6071616" y="2331720"/>
+            <a:ext cx="365760" cy="457200"/>
+          </a:xfrm>
+          <a:prstGeom prst="rect">
+            <a:avLst/>
+          </a:prstGeom>
+          <a:noFill/>
+          <a:ln/>
+        </p:spPr>
+        <p:txBody>
+          <a:bodyPr wrap="square" lIns="0" tIns="0" rIns="0" bIns="0" rtlCol="0" anchor="ctr"/>
+          <a:lstStyle/>
+          <a:p>
+            <a:pPr marL="0" indent="0" algn="ctr">
+              <a:buNone/>
+            </a:pPr>
+            <a:r>
+              <a:rPr lang="en-US" sz="1800" dirty="0">
+                <a:solidFill>
+                  <a:srgbClr val="7A93AE"/>
+                </a:solidFill>
+              </a:rPr>
+              <a:t>→</a:t>
+            </a:r>
+            <a:endParaRPr lang="en-US" sz="1800" dirty="0"/>
+          </a:p>
+        </p:txBody>
+      </p:sp>
+      <p:sp>
+        <p:nvSpPr>
+          <p:cNvPr id="13" name="Shape 10"/>
+          <p:cNvSpPr/>
+          <p:nvPr/>
+        </p:nvSpPr>
+        <p:spPr>
+          <a:xfrm>
+            <a:off x="6382512" y="1417320"/>
+            <a:ext cx="2724912" cy="2377440"/>
+          </a:xfrm>
+          <a:prstGeom prst="roundRect">
+            <a:avLst>
+              <a:gd name="adj" fmla="val 3077"/>
+            </a:avLst>
+          </a:prstGeom>
+          <a:solidFill>
+            <a:srgbClr val="0D1424"/>
+          </a:solidFill>
+          <a:ln w="12700">
+            <a:solidFill>
+              <a:srgbClr val="1E3A5C"/>
+            </a:solidFill>
+            <a:prstDash val="solid"/>
+          </a:ln>
+        </p:spPr>
+      </p:sp>
+      <p:sp>
+        <p:nvSpPr>
+          <p:cNvPr id="14" name="Text 11"/>
+          <p:cNvSpPr/>
+          <p:nvPr/>
+        </p:nvSpPr>
+        <p:spPr>
+          <a:xfrm>
+            <a:off x="6382512" y="1691640"/>
+            <a:ext cx="2724912" cy="822960"/>
+          </a:xfrm>
+          <a:prstGeom prst="rect">
+            <a:avLst/>
+          </a:prstGeom>
+          <a:noFill/>
+          <a:ln/>
+        </p:spPr>
+        <p:txBody>
+          <a:bodyPr wrap="square" lIns="0" tIns="0" rIns="0" bIns="0" rtlCol="0" anchor="ctr"/>
+          <a:lstStyle/>
+          <a:p>
+            <a:pPr marL="0" indent="0" algn="ctr">
+              <a:buNone/>
+            </a:pPr>
+            <a:r>
+              <a:rPr lang="en-US" sz="3000" b="1" dirty="0">
+                <a:solidFill>
+                  <a:srgbClr val="F2E3C8"/>
+                </a:solidFill>
+                <a:latin typeface="Courier New" pitchFamily="34" charset="0"/>
+                <a:ea typeface="Courier New" pitchFamily="34" charset="-122"/>
+                <a:cs typeface="Courier New" pitchFamily="34" charset="-120"/>
+              </a:rPr>
+              <a:t>÷ 250/秒</a:t>
+            </a:r>
+            <a:endParaRPr lang="en-US" sz="3000" dirty="0"/>
+          </a:p>
+        </p:txBody>
+      </p:sp>
+      <p:sp>
+        <p:nvSpPr>
+          <p:cNvPr id="15" name="Text 12"/>
+          <p:cNvSpPr/>
+          <p:nvPr/>
+        </p:nvSpPr>
+        <p:spPr>
+          <a:xfrm>
+            <a:off x="6519672" y="2651760"/>
+            <a:ext cx="2450592" cy="1005840"/>
+          </a:xfrm>
+          <a:prstGeom prst="rect">
+            <a:avLst/>
+          </a:prstGeom>
+          <a:noFill/>
+          <a:ln/>
+        </p:spPr>
+        <p:txBody>
+          <a:bodyPr wrap="square" lIns="0" tIns="0" rIns="0" bIns="0" rtlCol="0" anchor="ctr"/>
+          <a:lstStyle/>
+          <a:p>
+            <a:pPr marL="0" indent="0" algn="ctr">
+              <a:lnSpc>
+                <a:spcPct val="125000"/>
+              </a:lnSpc>
+              <a:buNone/>
+            </a:pPr>
+            <a:r>
+              <a:rPr lang="en-US" sz="800" dirty="0">
+                <a:solidFill>
+                  <a:srgbClr val="C9D6E8"/>
+                </a:solidFill>
+                <a:latin typeface="Microsoft JhengHei" pitchFamily="34" charset="0"/>
+                <a:ea typeface="Microsoft JhengHei" pitchFamily="34" charset="-122"/>
+                <a:cs typeface="Microsoft JhengHei" pitchFamily="34" charset="-120"/>
+              </a:rPr>
+              <a:t>直傳地球的速度</a:t>
+            </a:r>
+            <a:endParaRPr lang="en-US" sz="800" dirty="0"/>
+          </a:p>
+          <a:p>
+            <a:pPr marL="0" indent="0" algn="ctr">
+              <a:lnSpc>
+                <a:spcPct val="125000"/>
+              </a:lnSpc>
+              <a:buNone/>
+            </a:pPr>
+            <a:r>
+              <a:rPr lang="en-US" sz="800" dirty="0">
+                <a:solidFill>
+                  <a:srgbClr val="C9D6E8"/>
+                </a:solidFill>
+                <a:latin typeface="Microsoft JhengHei" pitchFamily="34" charset="0"/>
+                <a:ea typeface="Microsoft JhengHei" pitchFamily="34" charset="-122"/>
+                <a:cs typeface="Microsoft JhengHei" pitchFamily="34" charset="-120"/>
+              </a:rPr>
+              <a:t>（每秒約 250 個訊號）</a:t>
+            </a:r>
+            <a:endParaRPr lang="en-US" sz="800" dirty="0"/>
+          </a:p>
+        </p:txBody>
+      </p:sp>
+      <p:sp>
+        <p:nvSpPr>
+          <p:cNvPr id="16" name="Text 13"/>
+          <p:cNvSpPr/>
+          <p:nvPr/>
+        </p:nvSpPr>
+        <p:spPr>
+          <a:xfrm>
+            <a:off x="9034272" y="2331720"/>
+            <a:ext cx="365760" cy="457200"/>
+          </a:xfrm>
+          <a:prstGeom prst="rect">
+            <a:avLst/>
+          </a:prstGeom>
+          <a:noFill/>
+          <a:ln/>
+        </p:spPr>
+        <p:txBody>
+          <a:bodyPr wrap="square" lIns="0" tIns="0" rIns="0" bIns="0" rtlCol="0" anchor="ctr"/>
+          <a:lstStyle/>
+          <a:p>
+            <a:pPr marL="0" indent="0" algn="ctr">
+              <a:buNone/>
+            </a:pPr>
+            <a:r>
+              <a:rPr lang="en-US" sz="1800" dirty="0">
+                <a:solidFill>
+                  <a:srgbClr val="7A93AE"/>
+                </a:solidFill>
+              </a:rPr>
+              <a:t>→</a:t>
+            </a:r>
+            <a:endParaRPr lang="en-US" sz="1800" dirty="0"/>
+          </a:p>
+        </p:txBody>
+      </p:sp>
+      <p:sp>
+        <p:nvSpPr>
+          <p:cNvPr id="17" name="Shape 14"/>
+          <p:cNvSpPr/>
+          <p:nvPr/>
+        </p:nvSpPr>
+        <p:spPr>
+          <a:xfrm>
+            <a:off x="9345168" y="1417320"/>
+            <a:ext cx="2724912" cy="2377440"/>
+          </a:xfrm>
+          <a:prstGeom prst="roundRect">
+            <a:avLst>
+              <a:gd name="adj" fmla="val 3077"/>
+            </a:avLst>
+          </a:prstGeom>
+          <a:solidFill>
+            <a:srgbClr val="0D1424"/>
+          </a:solidFill>
+          <a:ln w="25400">
+            <a:solidFill>
+              <a:srgbClr val="FFB347"/>
+            </a:solidFill>
+            <a:prstDash val="solid"/>
+          </a:ln>
+        </p:spPr>
+      </p:sp>
+      <p:sp>
+        <p:nvSpPr>
+          <p:cNvPr id="18" name="Text 15"/>
+          <p:cNvSpPr/>
+          <p:nvPr/>
+        </p:nvSpPr>
+        <p:spPr>
+          <a:xfrm>
+            <a:off x="9345168" y="1691640"/>
+            <a:ext cx="2724912" cy="822960"/>
+          </a:xfrm>
+          <a:prstGeom prst="rect">
+            <a:avLst/>
+          </a:prstGeom>
+          <a:noFill/>
+          <a:ln/>
+        </p:spPr>
+        <p:txBody>
+          <a:bodyPr wrap="square" lIns="0" tIns="0" rIns="0" bIns="0" rtlCol="0" anchor="ctr"/>
+          <a:lstStyle/>
+          <a:p>
+            <a:pPr marL="0" indent="0" algn="ctr">
+              <a:buNone/>
+            </a:pPr>
+            <a:r>
+              <a:rPr lang="en-US" sz="3000" b="1" dirty="0">
+                <a:solidFill>
+                  <a:srgbClr val="FFB347"/>
+                </a:solidFill>
+                <a:latin typeface="Courier New" pitchFamily="34" charset="0"/>
+                <a:ea typeface="Courier New" pitchFamily="34" charset="-122"/>
+                <a:cs typeface="Courier New" pitchFamily="34" charset="-120"/>
+              </a:rPr>
+              <a:t>3 天 3 夜+</a:t>
+            </a:r>
+            <a:endParaRPr lang="en-US" sz="3000" dirty="0"/>
+          </a:p>
+        </p:txBody>
+      </p:sp>
+      <p:sp>
+        <p:nvSpPr>
+          <p:cNvPr id="19" name="Text 16"/>
+          <p:cNvSpPr/>
+          <p:nvPr/>
+        </p:nvSpPr>
+        <p:spPr>
+          <a:xfrm>
+            <a:off x="9482328" y="2651760"/>
+            <a:ext cx="2450592" cy="1005840"/>
+          </a:xfrm>
+          <a:prstGeom prst="rect">
+            <a:avLst/>
+          </a:prstGeom>
+          <a:noFill/>
+          <a:ln/>
+        </p:spPr>
+        <p:txBody>
+          <a:bodyPr wrap="square" lIns="0" tIns="0" rIns="0" bIns="0" rtlCol="0" anchor="ctr"/>
+          <a:lstStyle/>
+          <a:p>
+            <a:pPr marL="0" indent="0" algn="ctr">
+              <a:lnSpc>
+                <a:spcPct val="125000"/>
+              </a:lnSpc>
+              <a:buNone/>
+            </a:pPr>
+            <a:r>
+              <a:rPr lang="en-US" sz="800" dirty="0">
+                <a:solidFill>
+                  <a:srgbClr val="C9D6E8"/>
+                </a:solidFill>
+                <a:latin typeface="Microsoft JhengHei" pitchFamily="34" charset="0"/>
+                <a:ea typeface="Microsoft JhengHei" pitchFamily="34" charset="-122"/>
+                <a:cs typeface="Microsoft JhengHei" pitchFamily="34" charset="-120"/>
+              </a:rPr>
+              <a:t>傳完我的照片</a:t>
+            </a:r>
+            <a:endParaRPr lang="en-US" sz="800" dirty="0"/>
+          </a:p>
+          <a:p>
+            <a:pPr marL="0" indent="0" algn="ctr">
+              <a:lnSpc>
+                <a:spcPct val="125000"/>
+              </a:lnSpc>
+              <a:buNone/>
+            </a:pPr>
+            <a:r>
+              <a:rPr lang="en-US" sz="800" dirty="0">
+                <a:solidFill>
+                  <a:srgbClr val="C9D6E8"/>
+                </a:solidFill>
+                <a:latin typeface="Microsoft JhengHei" pitchFamily="34" charset="0"/>
+                <a:ea typeface="Microsoft JhengHei" pitchFamily="34" charset="-122"/>
+                <a:cs typeface="Microsoft JhengHei" pitchFamily="34" charset="-120"/>
+              </a:rPr>
+              <a:t>（約 288,000 秒）</a:t>
+            </a:r>
+            <a:endParaRPr lang="en-US" sz="800" dirty="0"/>
+          </a:p>
+        </p:txBody>
+      </p:sp>
+      <p:sp>
+        <p:nvSpPr>
+          <p:cNvPr id="22" name="Shape 2"/>
+          <p:cNvSpPr/>
+          <p:nvPr/>
+        </p:nvSpPr>
+        <p:spPr>
+          <a:xfrm>
+            <a:off x="1680926" y="4434840"/>
+            <a:ext cx="10251994" cy="1676862"/>
+          </a:xfrm>
+          <a:prstGeom prst="roundRect">
+            <a:avLst>
+              <a:gd name="adj" fmla="val 3077"/>
+            </a:avLst>
+          </a:prstGeom>
+          <a:solidFill>
+            <a:srgbClr val="0D1424"/>
+          </a:solidFill>
+          <a:ln w="12700">
+            <a:solidFill>
+              <a:srgbClr val="1E3A5C"/>
+            </a:solidFill>
+            <a:prstDash val="solid"/>
+          </a:ln>
+        </p:spPr>
+      </p:sp>
+      <p:sp>
+        <p:nvSpPr>
+          <p:cNvPr id="20" name="Text 17"/>
+          <p:cNvSpPr/>
+          <p:nvPr/>
+        </p:nvSpPr>
+        <p:spPr>
+          <a:xfrm>
+            <a:off x="2007108" y="4884512"/>
+            <a:ext cx="9025128" cy="694252"/>
+          </a:xfrm>
+          <a:prstGeom prst="rect">
+            <a:avLst/>
+          </a:prstGeom>
+          <a:noFill/>
+          <a:ln/>
+        </p:spPr>
+        <p:txBody>
+          <a:bodyPr wrap="square" lIns="0" tIns="0" rIns="0" bIns="0" rtlCol="0" anchor="ctr"/>
+          <a:lstStyle/>
+          <a:p>
+            <a:pPr marL="0" indent="0">
+              <a:lnSpc>
+                <a:spcPct val="150000"/>
+              </a:lnSpc>
+              <a:buNone/>
+            </a:pPr>
+            <a:r>
+              <a:rPr lang="zh-TW" altLang="en-US" sz="2000" b="1" dirty="0" smtClean="0">
+                <a:solidFill>
+                  <a:schemeClr val="accent2"/>
+                </a:solidFill>
+                <a:latin typeface="Microsoft JhengHei" pitchFamily="34" charset="0"/>
+                <a:ea typeface="Microsoft JhengHei" pitchFamily="34" charset="-122"/>
+                <a:cs typeface="Microsoft JhengHei" pitchFamily="34" charset="-120"/>
+              </a:rPr>
+              <a:t>知識點</a:t>
+            </a:r>
+            <a:endParaRPr lang="en-US" altLang="zh-TW" sz="2000" b="1" dirty="0" smtClean="0">
+              <a:solidFill>
+                <a:schemeClr val="accent2"/>
+              </a:solidFill>
+              <a:latin typeface="Microsoft JhengHei" pitchFamily="34" charset="0"/>
+              <a:ea typeface="Microsoft JhengHei" pitchFamily="34" charset="-122"/>
+              <a:cs typeface="Microsoft JhengHei" pitchFamily="34" charset="-120"/>
+            </a:endParaRPr>
+          </a:p>
+          <a:p>
+            <a:pPr>
+              <a:lnSpc>
+                <a:spcPct val="150000"/>
+              </a:lnSpc>
+            </a:pPr>
+            <a:r>
+              <a:rPr lang="zh-TW" altLang="en-US" sz="2000" b="1" dirty="0" smtClean="0">
+                <a:solidFill>
+                  <a:srgbClr val="5EC8F2"/>
+                </a:solidFill>
+                <a:latin typeface="Microsoft JhengHei" pitchFamily="34" charset="0"/>
+                <a:ea typeface="Microsoft JhengHei" pitchFamily="34" charset="-122"/>
+                <a:cs typeface="Microsoft JhengHei" pitchFamily="34" charset="-120"/>
+              </a:rPr>
+              <a:t>彩色（每格 24 位元）要 13 天以上！而你的手機不到一秒就傳完——同一套原理，只是快了幾百萬倍</a:t>
+            </a:r>
+            <a:r>
+              <a:rPr lang="en-US" sz="2000" b="1" dirty="0" smtClean="0">
+                <a:solidFill>
+                  <a:srgbClr val="5EC8F2"/>
+                </a:solidFill>
+                <a:latin typeface="Microsoft JhengHei" pitchFamily="34" charset="0"/>
+                <a:ea typeface="Microsoft JhengHei" pitchFamily="34" charset="-122"/>
+                <a:cs typeface="Microsoft JhengHei" pitchFamily="34" charset="-120"/>
+              </a:rPr>
+              <a:t>。</a:t>
+            </a:r>
+            <a:r>
+              <a:rPr lang="zh-TW" altLang="en-US" sz="2000" b="1" dirty="0" smtClean="0">
+                <a:solidFill>
+                  <a:srgbClr val="5EC8F2"/>
+                </a:solidFill>
+                <a:latin typeface="Microsoft JhengHei" pitchFamily="34" charset="0"/>
+                <a:ea typeface="Microsoft JhengHei" pitchFamily="34" charset="-122"/>
+                <a:cs typeface="Microsoft JhengHei" pitchFamily="34" charset="-120"/>
+              </a:rPr>
+              <a:t/>
+            </a:r>
+            <a:r>
+              <a:rPr lang="en-US" sz="2000" b="1" dirty="0" err="1" smtClean="0">
+                <a:solidFill>
+                  <a:srgbClr val="5EC8F2"/>
+                </a:solidFill>
+                <a:latin typeface="Microsoft JhengHei" pitchFamily="34" charset="0"/>
+                <a:ea typeface="Microsoft JhengHei" pitchFamily="34" charset="-122"/>
+                <a:cs typeface="Microsoft JhengHei" pitchFamily="34" charset="-120"/>
+              </a:rPr>
+              <a:t/>
+            </a:r>
+            <a:r>
+              <a:rPr lang="en-US" sz="2000" b="1" dirty="0" smtClean="0">
+                <a:solidFill>
+                  <a:srgbClr val="5EC8F2"/>
+                </a:solidFill>
+                <a:latin typeface="Microsoft JhengHei" pitchFamily="34" charset="0"/>
+                <a:ea typeface="Microsoft JhengHei" pitchFamily="34" charset="-122"/>
+                <a:cs typeface="Microsoft JhengHei" pitchFamily="34" charset="-120"/>
+              </a:rPr>
+              <a:t/>
+            </a:r>
+            <a:r>
+              <a:rPr lang="zh-TW" altLang="en-US" sz="2000" b="1" dirty="0" smtClean="0">
+                <a:solidFill>
+                  <a:srgbClr val="5EC8F2"/>
+                </a:solidFill>
+                <a:latin typeface="Microsoft JhengHei" pitchFamily="34" charset="0"/>
+                <a:ea typeface="Microsoft JhengHei" pitchFamily="34" charset="-122"/>
+                <a:cs typeface="Microsoft JhengHei" pitchFamily="34" charset="-120"/>
+              </a:rPr>
+              <a:t/>
+            </a:r>
+            <a:r>
+              <a:rPr lang="en-US" altLang="zh-TW" sz="2000" b="1" dirty="0" err="1" smtClean="0">
+                <a:solidFill>
+                  <a:srgbClr val="5EC8F2"/>
+                </a:solidFill>
+                <a:latin typeface="Microsoft JhengHei" pitchFamily="34" charset="0"/>
+                <a:ea typeface="Microsoft JhengHei" pitchFamily="34" charset="-122"/>
+                <a:cs typeface="Microsoft JhengHei" pitchFamily="34" charset="-120"/>
+              </a:rPr>
+              <a:t/>
+            </a:r>
+            <a:r>
+              <a:rPr lang="en-US" altLang="zh-TW" sz="2000" b="1" dirty="0" err="1">
+                <a:solidFill>
+                  <a:srgbClr val="5EC8F2"/>
+                </a:solidFill>
+                <a:latin typeface="Microsoft JhengHei" pitchFamily="34" charset="0"/>
+                <a:ea typeface="Microsoft JhengHei" pitchFamily="34" charset="-122"/>
+                <a:cs typeface="Microsoft JhengHei" pitchFamily="34" charset="-120"/>
+              </a:rPr>
+              <a:t/>
+            </a:r>
+            <a:r>
+              <a:rPr lang="en-US" altLang="zh-TW" sz="2000" b="1" dirty="0" err="1" smtClean="0">
+                <a:solidFill>
+                  <a:srgbClr val="5EC8F2"/>
+                </a:solidFill>
+                <a:latin typeface="Microsoft JhengHei" pitchFamily="34" charset="0"/>
+                <a:ea typeface="Microsoft JhengHei" pitchFamily="34" charset="-122"/>
+                <a:cs typeface="Microsoft JhengHei" pitchFamily="34" charset="-120"/>
+              </a:rPr>
+              <a:t/>
+            </a:r>
+            <a:r>
+              <a:rPr lang="zh-TW" altLang="en-US" sz="2000" b="1" dirty="0" smtClean="0">
+                <a:solidFill>
+                  <a:srgbClr val="5EC8F2"/>
+                </a:solidFill>
+                <a:latin typeface="Microsoft JhengHei" pitchFamily="34" charset="0"/>
+                <a:ea typeface="Microsoft JhengHei" pitchFamily="34" charset="-122"/>
+                <a:cs typeface="Microsoft JhengHei" pitchFamily="34" charset="-120"/>
+              </a:rPr>
+              <a:t/>
+            </a:r>
+            <a:r>
+              <a:rPr lang="zh-TW" altLang="en-US" sz="2000" b="1" dirty="0" smtClean="0">
+                <a:solidFill>
+                  <a:srgbClr val="5EC8F2"/>
+                </a:solidFill>
+                <a:latin typeface="Microsoft JhengHei" pitchFamily="34" charset="0"/>
+                <a:ea typeface="Microsoft JhengHei" pitchFamily="34" charset="-122"/>
+                <a:cs typeface="Microsoft JhengHei" pitchFamily="34" charset="-120"/>
+              </a:rPr>
+              <a:t/>
+            </a:r>
+            <a:endParaRPr lang="en-US" sz="2000" dirty="0"/>
+          </a:p>
+        </p:txBody>
+      </p:sp>
+    </p:spTree>
+  </p:cSld>
+  <p:clrMapOvr>
+    <a:masterClrMapping/>
+  </p:clrMapOvr>
+</p:sld>
+</file>
+
+<file path=ppt/slides/slide11.xml><?xml version="1.0" encoding="utf-8"?>
+<p:sld xmlns:a="http://schemas.openxmlformats.org/drawingml/2006/main" xmlns:r="http://schemas.openxmlformats.org/officeDocument/2006/relationships" xmlns:p="http://schemas.openxmlformats.org/presentationml/2006/main">
   <p:cSld name="Slide 10">
     <p:bg>
       <p:bgPr>
@@ -2172,7 +3109,7 @@
 </p:sld>
 </file>
 
-<file path=ppt/slides/slide11.xml><?xml version="1.0" encoding="utf-8"?>
+<file path=ppt/slides/slide12.xml><?xml version="1.0" encoding="utf-8"?>
 <p:sld xmlns:a="http://schemas.openxmlformats.org/drawingml/2006/main" xmlns:r="http://schemas.openxmlformats.org/officeDocument/2006/relationships" xmlns:p="http://schemas.openxmlformats.org/presentationml/2006/main">
   <p:cSld name="Slide 11">
     <p:bg>
@@ -3251,7 +4188,7 @@
 </p:sld>
 </file>
 
-<file path=ppt/slides/slide12.xml><?xml version="1.0" encoding="utf-8"?>
+<file path=ppt/slides/slide13.xml><?xml version="1.0" encoding="utf-8"?>
 <p:sld xmlns:a="http://schemas.openxmlformats.org/drawingml/2006/main" xmlns:r="http://schemas.openxmlformats.org/officeDocument/2006/relationships" xmlns:p="http://schemas.openxmlformats.org/presentationml/2006/main">
   <p:cSld name="Slide 12">
     <p:bg>
